--- a/public/level3/downloads/slides/Level3_Lesson12_Slides.pptx
+++ b/public/level3/downloads/slides/Level3_Lesson12_Slides.pptx
@@ -1186,7 +1186,7 @@
           </a:p>
           <a:p>
             <a:r>
-              <a:t>The audio (about 1:15) is coming soon. When it is ready, it plays the conversation once; press play again for play 2. Until then, read the listening script (at the end of these notes) with a volunteer.</a:t>
+              <a:t>The audio (L3_L12_listening.mp3, about 1:16) plays the conversation once. Press play again for play 2. A third play is fine if the class needs it.</a:t>
             </a:r>
           </a:p>
           <a:p>
@@ -1196,7 +1196,7 @@
           </a:p>
           <a:p>
             <a:r>
-              <a:t>Audio: the listening audio for this lesson (about 1:15) is coming soon. It will use computer-generated voices (Chatterbox TTS cloned from synthetic Kokoro-82M reference clips); no recordings of real people. Until it is ready, read the listening script (in the notes of the Before You Listen slide) with a volunteer. The names and the story are invented.</a:t>
+              <a:t>Audio: synthetic voices, computer-generated (Chatterbox TTS cloned from Kokoro-82M reference clips). No recordings of real people. The names and the story are invented.</a:t>
             </a:r>
           </a:p>
           <a:p>
@@ -1207,81 +1207,6 @@
           <a:p>
             <a:r>
               <a:t>Picture: Twemoji graphics by Twitter, Inc. and other contributors (https://github.com/jdecked/twemoji), CC BY 4.0 (https://creativecommons.org/licenses/by/4.0/); resized and combined, with speech bubbles, signs, and labels (images/CREDITS.md).</a:t>
-            </a:r>
-          </a:p>
-          <a:p>
-            <a:r>
-              <a:t>Listening script (the audio is coming soon; until then, read it aloud with a volunteer at a normal, friendly speed):</a:t>
-            </a:r>
-          </a:p>
-          <a:p>
-            <a:r>
-              <a:t>Narrator: Lesson twelve. Listening. Sara lives in an apartment. She's calling the building office about some problems. Listen.</a:t>
-            </a:r>
-          </a:p>
-          <a:p>
-            <a:r>
-              <a:t>Mr. Grant: Maple Court Apartments, this is Mr. Grant. How can I help you?</a:t>
-            </a:r>
-          </a:p>
-          <a:p>
-            <a:r>
-              <a:t>Sara: Hi, this is Sara in apartment 4B. Something is wrong with my kitchen sink. It's leaking.</a:t>
-            </a:r>
-          </a:p>
-          <a:p>
-            <a:r>
-              <a:t>Mr. Grant: Oh no. Is there any water on the floor?</a:t>
-            </a:r>
-          </a:p>
-          <a:p>
-            <a:r>
-              <a:t>Sara: Yes, a little. I put a towel under it. And there's something else. The heater doesn't work.</a:t>
-            </a:r>
-          </a:p>
-          <a:p>
-            <a:r>
-              <a:t>Mr. Grant: Do you see anything on the screen?</a:t>
-            </a:r>
-          </a:p>
-          <a:p>
-            <a:r>
-              <a:t>Sara: No, I don't see anything. The screen is black, and the apartment is really cold.</a:t>
-            </a:r>
-          </a:p>
-          <a:p>
-            <a:r>
-              <a:t>Mr. Grant: OK. I'll send someone tomorrow morning. Is anyone home at nine?</a:t>
-            </a:r>
-          </a:p>
-          <a:p>
-            <a:r>
-              <a:t>Sara: No, no one is home in the morning. I work until two.</a:t>
-            </a:r>
-          </a:p>
-          <a:p>
-            <a:r>
-              <a:t>Mr. Grant: How about Tuesday at three?</a:t>
-            </a:r>
-          </a:p>
-          <a:p>
-            <a:r>
-              <a:t>Sara: Tuesday at three is fine. If it gets worse tonight, I'll call you.</a:t>
-            </a:r>
-          </a:p>
-          <a:p>
-            <a:r>
-              <a:t>Mr. Grant: Great. The repair person will fix both things. Until then, don't use the sink.</a:t>
-            </a:r>
-          </a:p>
-          <a:p>
-            <a:r>
-              <a:t>Sara: OK, I won't. Thank you so much.</a:t>
-            </a:r>
-          </a:p>
-          <a:p>
-            <a:r>
-              <a:t>Narrator: That's the end of the listening.</a:t>
             </a:r>
           </a:p>
         </p:txBody>
@@ -2771,7 +2696,7 @@
           </a:p>
           <a:p>
             <a:r>
-              <a:t>Audio: the listening audio for this lesson (about 1:15) is coming soon. It will use computer-generated voices (Chatterbox TTS cloned from synthetic Kokoro-82M reference clips); no recordings of real people. Until it is ready, read the listening script (in the notes of the Before You Listen slide) with a volunteer. The names and the story are invented.</a:t>
+              <a:t>Audio: synthetic voices, computer-generated (Chatterbox TTS cloned from Kokoro-82M reference clips). No recordings of real people. The names and the story are invented.</a:t>
             </a:r>
           </a:p>
           <a:p>
@@ -11998,7 +11923,7 @@
                 <a:ea typeface="Lexend Deca" pitchFamily="34" charset="-122"/>
                 <a:cs typeface="Lexend Deca" pitchFamily="34" charset="-120"/>
               </a:rPr>
-              <a:t>Audio: about 1:15. It plays once.</a:t>
+              <a:t>Audio: about 1:16. It plays once.</a:t>
             </a:r>
             <a:endParaRPr lang="en-US" sz="2200" dirty="0"/>
           </a:p>
@@ -30902,7 +30827,7 @@
                 <a:ea typeface="Lexend Deca" pitchFamily="34" charset="-122"/>
                 <a:cs typeface="Lexend Deca" pitchFamily="34" charset="-120"/>
               </a:rPr>
-              <a:t>Audio (coming soon): synthetic voices made with Chatterbox TTS (MIT License), cloned from short synthetic reference clips made with Kokoro-82M (Apache License 2.0). No recordings of real people. Each file will carry an inaudible Perth watermark marking it as AI-generated. Font: Lexend Deca (OFL 1.1).</a:t>
+              <a:t>Audio: synthetic voices made with Chatterbox TTS (MIT License), cloned from short synthetic reference clips made with Kokoro-82M (Apache License 2.0). No recordings of real people were used. Each file carries an inaudible Perth watermark marking it as AI-generated. Font: Lexend Deca (OFL 1.1).</a:t>
             </a:r>
             <a:endParaRPr lang="en-US" sz="1350" dirty="0" b="0"/>
           </a:p>
